--- a/m6/diapositivos/sessao-07-m6-f05.pptx
+++ b/m6/diapositivos/sessao-07-m6-f05.pptx
@@ -1884,7 +1884,279 @@
                 <a:ea typeface="Georgia" pitchFamily="34" charset="-122"/>
                 <a:cs typeface="Georgia" pitchFamily="34" charset="-120"/>
               </a:rPr>
-              <a:t>O étimo é a palavra de origem (muitas vezes latina). Do mesmo étimo podem nascer palavras divergentes: uma por via popular (evolução fonética lenta) e outra por via erudita (tomada mais tarde, próxima do latim), por exemplo plenu- → cheio / pleno. As edições do século XIX mostram grafias anteriores às reformas ortográficas: occidental, melancholia, lyrios.</a:t>
+              <a:t>O </a:t>
+            </a:r>
+            <a:pPr indent="0" marL="0">
+              <a:lnSpc>
+                <a:spcPct val="120000"/>
+              </a:lnSpc>
+              <a:buNone/>
+            </a:pPr>
+            <a:r>
+              <a:rPr lang="en-US" sz="2300" b="1" dirty="0">
+                <a:solidFill>
+                  <a:srgbClr val="F2F0EA"/>
+                </a:solidFill>
+                <a:latin typeface="Georgia" pitchFamily="34" charset="0"/>
+                <a:ea typeface="Georgia" pitchFamily="34" charset="-122"/>
+                <a:cs typeface="Georgia" pitchFamily="34" charset="-120"/>
+              </a:rPr>
+              <a:t>étimo</a:t>
+            </a:r>
+            <a:pPr indent="0" marL="0">
+              <a:lnSpc>
+                <a:spcPct val="120000"/>
+              </a:lnSpc>
+              <a:buNone/>
+            </a:pPr>
+            <a:r>
+              <a:rPr lang="en-US" sz="2300" dirty="0">
+                <a:solidFill>
+                  <a:srgbClr val="F2F0EA"/>
+                </a:solidFill>
+                <a:latin typeface="Georgia" pitchFamily="34" charset="0"/>
+                <a:ea typeface="Georgia" pitchFamily="34" charset="-122"/>
+                <a:cs typeface="Georgia" pitchFamily="34" charset="-120"/>
+              </a:rPr>
+              <a:t> é a palavra de origem (muitas vezes latina). Do mesmo étimo podem nascer </a:t>
+            </a:r>
+            <a:pPr indent="0" marL="0">
+              <a:lnSpc>
+                <a:spcPct val="120000"/>
+              </a:lnSpc>
+              <a:buNone/>
+            </a:pPr>
+            <a:r>
+              <a:rPr lang="en-US" sz="2300" b="1" dirty="0">
+                <a:solidFill>
+                  <a:srgbClr val="F2F0EA"/>
+                </a:solidFill>
+                <a:latin typeface="Georgia" pitchFamily="34" charset="0"/>
+                <a:ea typeface="Georgia" pitchFamily="34" charset="-122"/>
+                <a:cs typeface="Georgia" pitchFamily="34" charset="-120"/>
+              </a:rPr>
+              <a:t>palavras divergentes</a:t>
+            </a:r>
+            <a:pPr indent="0" marL="0">
+              <a:lnSpc>
+                <a:spcPct val="120000"/>
+              </a:lnSpc>
+              <a:buNone/>
+            </a:pPr>
+            <a:r>
+              <a:rPr lang="en-US" sz="2300" dirty="0">
+                <a:solidFill>
+                  <a:srgbClr val="F2F0EA"/>
+                </a:solidFill>
+                <a:latin typeface="Georgia" pitchFamily="34" charset="0"/>
+                <a:ea typeface="Georgia" pitchFamily="34" charset="-122"/>
+                <a:cs typeface="Georgia" pitchFamily="34" charset="-120"/>
+              </a:rPr>
+              <a:t>: uma por via popular (evolução fonética lenta) e outra por via erudita (tomada mais tarde, próxima do latim), por exemplo </a:t>
+            </a:r>
+            <a:pPr indent="0" marL="0">
+              <a:lnSpc>
+                <a:spcPct val="120000"/>
+              </a:lnSpc>
+              <a:buNone/>
+            </a:pPr>
+            <a:r>
+              <a:rPr lang="en-US" sz="2300" i="1" dirty="0">
+                <a:solidFill>
+                  <a:srgbClr val="F2F0EA"/>
+                </a:solidFill>
+                <a:latin typeface="Georgia" pitchFamily="34" charset="0"/>
+                <a:ea typeface="Georgia" pitchFamily="34" charset="-122"/>
+                <a:cs typeface="Georgia" pitchFamily="34" charset="-120"/>
+              </a:rPr>
+              <a:t>plenu-</a:t>
+            </a:r>
+            <a:pPr indent="0" marL="0">
+              <a:lnSpc>
+                <a:spcPct val="120000"/>
+              </a:lnSpc>
+              <a:buNone/>
+            </a:pPr>
+            <a:r>
+              <a:rPr lang="en-US" sz="2300" dirty="0">
+                <a:solidFill>
+                  <a:srgbClr val="F2F0EA"/>
+                </a:solidFill>
+                <a:latin typeface="Georgia" pitchFamily="34" charset="0"/>
+                <a:ea typeface="Georgia" pitchFamily="34" charset="-122"/>
+                <a:cs typeface="Georgia" pitchFamily="34" charset="-120"/>
+              </a:rPr>
+              <a:t> → </a:t>
+            </a:r>
+            <a:pPr indent="0" marL="0">
+              <a:lnSpc>
+                <a:spcPct val="120000"/>
+              </a:lnSpc>
+              <a:buNone/>
+            </a:pPr>
+            <a:r>
+              <a:rPr lang="en-US" sz="2300" i="1" dirty="0">
+                <a:solidFill>
+                  <a:srgbClr val="F2F0EA"/>
+                </a:solidFill>
+                <a:latin typeface="Georgia" pitchFamily="34" charset="0"/>
+                <a:ea typeface="Georgia" pitchFamily="34" charset="-122"/>
+                <a:cs typeface="Georgia" pitchFamily="34" charset="-120"/>
+              </a:rPr>
+              <a:t>cheio</a:t>
+            </a:r>
+            <a:pPr indent="0" marL="0">
+              <a:lnSpc>
+                <a:spcPct val="120000"/>
+              </a:lnSpc>
+              <a:buNone/>
+            </a:pPr>
+            <a:r>
+              <a:rPr lang="en-US" sz="2300" dirty="0">
+                <a:solidFill>
+                  <a:srgbClr val="F2F0EA"/>
+                </a:solidFill>
+                <a:latin typeface="Georgia" pitchFamily="34" charset="0"/>
+                <a:ea typeface="Georgia" pitchFamily="34" charset="-122"/>
+                <a:cs typeface="Georgia" pitchFamily="34" charset="-120"/>
+              </a:rPr>
+              <a:t> / </a:t>
+            </a:r>
+            <a:pPr indent="0" marL="0">
+              <a:lnSpc>
+                <a:spcPct val="120000"/>
+              </a:lnSpc>
+              <a:buNone/>
+            </a:pPr>
+            <a:r>
+              <a:rPr lang="en-US" sz="2300" i="1" dirty="0">
+                <a:solidFill>
+                  <a:srgbClr val="F2F0EA"/>
+                </a:solidFill>
+                <a:latin typeface="Georgia" pitchFamily="34" charset="0"/>
+                <a:ea typeface="Georgia" pitchFamily="34" charset="-122"/>
+                <a:cs typeface="Georgia" pitchFamily="34" charset="-120"/>
+              </a:rPr>
+              <a:t>pleno</a:t>
+            </a:r>
+            <a:pPr indent="0" marL="0">
+              <a:lnSpc>
+                <a:spcPct val="120000"/>
+              </a:lnSpc>
+              <a:buNone/>
+            </a:pPr>
+            <a:r>
+              <a:rPr lang="en-US" sz="2300" dirty="0">
+                <a:solidFill>
+                  <a:srgbClr val="F2F0EA"/>
+                </a:solidFill>
+                <a:latin typeface="Georgia" pitchFamily="34" charset="0"/>
+                <a:ea typeface="Georgia" pitchFamily="34" charset="-122"/>
+                <a:cs typeface="Georgia" pitchFamily="34" charset="-120"/>
+              </a:rPr>
+              <a:t>. As edições do século XIX mostram grafias anteriores às reformas ortográficas: </a:t>
+            </a:r>
+            <a:pPr indent="0" marL="0">
+              <a:lnSpc>
+                <a:spcPct val="120000"/>
+              </a:lnSpc>
+              <a:buNone/>
+            </a:pPr>
+            <a:r>
+              <a:rPr lang="en-US" sz="2300" i="1" dirty="0">
+                <a:solidFill>
+                  <a:srgbClr val="F2F0EA"/>
+                </a:solidFill>
+                <a:latin typeface="Georgia" pitchFamily="34" charset="0"/>
+                <a:ea typeface="Georgia" pitchFamily="34" charset="-122"/>
+                <a:cs typeface="Georgia" pitchFamily="34" charset="-120"/>
+              </a:rPr>
+              <a:t>occidental</a:t>
+            </a:r>
+            <a:pPr indent="0" marL="0">
+              <a:lnSpc>
+                <a:spcPct val="120000"/>
+              </a:lnSpc>
+              <a:buNone/>
+            </a:pPr>
+            <a:r>
+              <a:rPr lang="en-US" sz="2300" dirty="0">
+                <a:solidFill>
+                  <a:srgbClr val="F2F0EA"/>
+                </a:solidFill>
+                <a:latin typeface="Georgia" pitchFamily="34" charset="0"/>
+                <a:ea typeface="Georgia" pitchFamily="34" charset="-122"/>
+                <a:cs typeface="Georgia" pitchFamily="34" charset="-120"/>
+              </a:rPr>
+              <a:t>, </a:t>
+            </a:r>
+            <a:pPr indent="0" marL="0">
+              <a:lnSpc>
+                <a:spcPct val="120000"/>
+              </a:lnSpc>
+              <a:buNone/>
+            </a:pPr>
+            <a:r>
+              <a:rPr lang="en-US" sz="2300" i="1" dirty="0">
+                <a:solidFill>
+                  <a:srgbClr val="F2F0EA"/>
+                </a:solidFill>
+                <a:latin typeface="Georgia" pitchFamily="34" charset="0"/>
+                <a:ea typeface="Georgia" pitchFamily="34" charset="-122"/>
+                <a:cs typeface="Georgia" pitchFamily="34" charset="-120"/>
+              </a:rPr>
+              <a:t>melancholia</a:t>
+            </a:r>
+            <a:pPr indent="0" marL="0">
+              <a:lnSpc>
+                <a:spcPct val="120000"/>
+              </a:lnSpc>
+              <a:buNone/>
+            </a:pPr>
+            <a:r>
+              <a:rPr lang="en-US" sz="2300" dirty="0">
+                <a:solidFill>
+                  <a:srgbClr val="F2F0EA"/>
+                </a:solidFill>
+                <a:latin typeface="Georgia" pitchFamily="34" charset="0"/>
+                <a:ea typeface="Georgia" pitchFamily="34" charset="-122"/>
+                <a:cs typeface="Georgia" pitchFamily="34" charset="-120"/>
+              </a:rPr>
+              <a:t>, </a:t>
+            </a:r>
+            <a:pPr indent="0" marL="0">
+              <a:lnSpc>
+                <a:spcPct val="120000"/>
+              </a:lnSpc>
+              <a:buNone/>
+            </a:pPr>
+            <a:r>
+              <a:rPr lang="en-US" sz="2300" i="1" dirty="0">
+                <a:solidFill>
+                  <a:srgbClr val="F2F0EA"/>
+                </a:solidFill>
+                <a:latin typeface="Georgia" pitchFamily="34" charset="0"/>
+                <a:ea typeface="Georgia" pitchFamily="34" charset="-122"/>
+                <a:cs typeface="Georgia" pitchFamily="34" charset="-120"/>
+              </a:rPr>
+              <a:t>lyrios</a:t>
+            </a:r>
+            <a:pPr indent="0" marL="0">
+              <a:lnSpc>
+                <a:spcPct val="120000"/>
+              </a:lnSpc>
+              <a:buNone/>
+            </a:pPr>
+            <a:r>
+              <a:rPr lang="en-US" sz="2300" dirty="0">
+                <a:solidFill>
+                  <a:srgbClr val="F2F0EA"/>
+                </a:solidFill>
+                <a:latin typeface="Georgia" pitchFamily="34" charset="0"/>
+                <a:ea typeface="Georgia" pitchFamily="34" charset="-122"/>
+                <a:cs typeface="Georgia" pitchFamily="34" charset="-120"/>
+              </a:rPr>
+              <a:t>.</a:t>
             </a:r>
             <a:endParaRPr lang="en-US" sz="2300" dirty="0"/>
           </a:p>
